--- a/docs/presentation.pptx
+++ b/docs/presentation.pptx
@@ -141,7 +141,7 @@
     </p:spTree>
     <p:extLst>
       <p:ext uri="{BB962C8B-B14F-4D97-AF65-F5344CB8AC3E}">
-        <p14:creationId xmlns:p14="http://schemas.microsoft.com/office/powerpoint/2010/main" val="1353617659"/>
+        <p14:creationId xmlns:p14="http://schemas.microsoft.com/office/powerpoint/2010/main" val="3008357563"/>
       </p:ext>
     </p:extLst>
   </p:cSld>
@@ -2118,9 +2118,12 @@
           <a:solidFill>
             <a:srgbClr val="141A2A"/>
           </a:solidFill>
-          <a:ln w="12700">
+          <a:ln w="19050">
             <a:solidFill>
-              <a:srgbClr val="334155"/>
+              <a:schemeClr val="accent4">
+                <a:lumMod val="60000"/>
+                <a:lumOff val="40000"/>
+              </a:schemeClr>
             </a:solidFill>
             <a:prstDash val="solid"/>
           </a:ln>
@@ -2672,9 +2675,12 @@
           <a:solidFill>
             <a:srgbClr val="141A2A"/>
           </a:solidFill>
-          <a:ln w="12700">
+          <a:ln w="19050">
             <a:solidFill>
-              <a:srgbClr val="334155"/>
+              <a:schemeClr val="accent4">
+                <a:lumMod val="60000"/>
+                <a:lumOff val="40000"/>
+              </a:schemeClr>
             </a:solidFill>
             <a:prstDash val="solid"/>
           </a:ln>
@@ -3216,9 +3222,12 @@
           <a:solidFill>
             <a:srgbClr val="141A2A"/>
           </a:solidFill>
-          <a:ln w="12700">
+          <a:ln w="19050">
             <a:solidFill>
-              <a:srgbClr val="334155"/>
+              <a:schemeClr val="accent4">
+                <a:lumMod val="60000"/>
+                <a:lumOff val="40000"/>
+              </a:schemeClr>
             </a:solidFill>
             <a:prstDash val="solid"/>
           </a:ln>
@@ -4655,7 +4664,11 @@
             <a:avLst/>
           </a:prstGeom>
           <a:noFill/>
-          <a:ln/>
+          <a:ln w="19050">
+            <a:solidFill>
+              <a:schemeClr val="tx1"/>
+            </a:solidFill>
+          </a:ln>
         </p:spPr>
         <p:txBody>
           <a:bodyPr wrap="square" rtlCol="0" anchor="ctr"/>
@@ -4670,7 +4683,7 @@
                   <a:srgbClr val="FEF3C7"/>
                 </a:solidFill>
               </a:rPr>
-              <a:t>🎮 Host Operations: Game Master advances rounds at /admin</a:t>
+              <a:t>🎮 Host Operations: Game Master at /admin • Solo sandbox at /solotester</a:t>
             </a:r>
             <a:endParaRPr lang="en-US" sz="1100" dirty="0"/>
           </a:p>
